--- a/ゲーム科1年/00_前期/ゲームプログラミングⅠ/03_ゲームロジックの基本.pptx
+++ b/ゲーム科1年/00_前期/ゲームプログラミングⅠ/03_ゲームロジックの基本.pptx
@@ -268,7 +268,7 @@
           <a:p>
             <a:fld id="{E9CC885B-4903-4D54-9A93-00025F12DED9}" type="datetimeFigureOut">
               <a:rPr kumimoji="1" lang="ja-JP" altLang="en-US" smtClean="0"/>
-              <a:t>2024/9/4</a:t>
+              <a:t>2025/3/3</a:t>
             </a:fld>
             <a:endParaRPr kumimoji="1" lang="ja-JP" altLang="en-US"/>
           </a:p>
@@ -498,7 +498,7 @@
           <a:p>
             <a:fld id="{E9CC885B-4903-4D54-9A93-00025F12DED9}" type="datetimeFigureOut">
               <a:rPr kumimoji="1" lang="ja-JP" altLang="en-US" smtClean="0"/>
-              <a:t>2024/9/4</a:t>
+              <a:t>2025/3/3</a:t>
             </a:fld>
             <a:endParaRPr kumimoji="1" lang="ja-JP" altLang="en-US"/>
           </a:p>
@@ -738,7 +738,7 @@
           <a:p>
             <a:fld id="{E9CC885B-4903-4D54-9A93-00025F12DED9}" type="datetimeFigureOut">
               <a:rPr kumimoji="1" lang="ja-JP" altLang="en-US" smtClean="0"/>
-              <a:t>2024/9/4</a:t>
+              <a:t>2025/3/3</a:t>
             </a:fld>
             <a:endParaRPr kumimoji="1" lang="ja-JP" altLang="en-US"/>
           </a:p>
@@ -968,7 +968,7 @@
           <a:p>
             <a:fld id="{E9CC885B-4903-4D54-9A93-00025F12DED9}" type="datetimeFigureOut">
               <a:rPr kumimoji="1" lang="ja-JP" altLang="en-US" smtClean="0"/>
-              <a:t>2024/9/4</a:t>
+              <a:t>2025/3/3</a:t>
             </a:fld>
             <a:endParaRPr kumimoji="1" lang="ja-JP" altLang="en-US"/>
           </a:p>
@@ -1243,7 +1243,7 @@
           <a:p>
             <a:fld id="{E9CC885B-4903-4D54-9A93-00025F12DED9}" type="datetimeFigureOut">
               <a:rPr kumimoji="1" lang="ja-JP" altLang="en-US" smtClean="0"/>
-              <a:t>2024/9/4</a:t>
+              <a:t>2025/3/3</a:t>
             </a:fld>
             <a:endParaRPr kumimoji="1" lang="ja-JP" altLang="en-US"/>
           </a:p>
@@ -1572,7 +1572,7 @@
           <a:p>
             <a:fld id="{E9CC885B-4903-4D54-9A93-00025F12DED9}" type="datetimeFigureOut">
               <a:rPr kumimoji="1" lang="ja-JP" altLang="en-US" smtClean="0"/>
-              <a:t>2024/9/4</a:t>
+              <a:t>2025/3/3</a:t>
             </a:fld>
             <a:endParaRPr kumimoji="1" lang="ja-JP" altLang="en-US"/>
           </a:p>
@@ -2048,7 +2048,7 @@
           <a:p>
             <a:fld id="{E9CC885B-4903-4D54-9A93-00025F12DED9}" type="datetimeFigureOut">
               <a:rPr kumimoji="1" lang="ja-JP" altLang="en-US" smtClean="0"/>
-              <a:t>2024/9/4</a:t>
+              <a:t>2025/3/3</a:t>
             </a:fld>
             <a:endParaRPr kumimoji="1" lang="ja-JP" altLang="en-US"/>
           </a:p>
@@ -2189,7 +2189,7 @@
           <a:p>
             <a:fld id="{E9CC885B-4903-4D54-9A93-00025F12DED9}" type="datetimeFigureOut">
               <a:rPr kumimoji="1" lang="ja-JP" altLang="en-US" smtClean="0"/>
-              <a:t>2024/9/4</a:t>
+              <a:t>2025/3/3</a:t>
             </a:fld>
             <a:endParaRPr kumimoji="1" lang="ja-JP" altLang="en-US"/>
           </a:p>
@@ -2302,7 +2302,7 @@
           <a:p>
             <a:fld id="{E9CC885B-4903-4D54-9A93-00025F12DED9}" type="datetimeFigureOut">
               <a:rPr kumimoji="1" lang="ja-JP" altLang="en-US" smtClean="0"/>
-              <a:t>2024/9/4</a:t>
+              <a:t>2025/3/3</a:t>
             </a:fld>
             <a:endParaRPr kumimoji="1" lang="ja-JP" altLang="en-US"/>
           </a:p>
@@ -2645,7 +2645,7 @@
           <a:p>
             <a:fld id="{E9CC885B-4903-4D54-9A93-00025F12DED9}" type="datetimeFigureOut">
               <a:rPr kumimoji="1" lang="ja-JP" altLang="en-US" smtClean="0"/>
-              <a:t>2024/9/4</a:t>
+              <a:t>2025/3/3</a:t>
             </a:fld>
             <a:endParaRPr kumimoji="1" lang="ja-JP" altLang="en-US"/>
           </a:p>
@@ -2933,7 +2933,7 @@
           <a:p>
             <a:fld id="{E9CC885B-4903-4D54-9A93-00025F12DED9}" type="datetimeFigureOut">
               <a:rPr kumimoji="1" lang="ja-JP" altLang="en-US" smtClean="0"/>
-              <a:t>2024/9/4</a:t>
+              <a:t>2025/3/3</a:t>
             </a:fld>
             <a:endParaRPr kumimoji="1" lang="ja-JP" altLang="en-US"/>
           </a:p>
@@ -3206,7 +3206,7 @@
           <a:p>
             <a:fld id="{E9CC885B-4903-4D54-9A93-00025F12DED9}" type="datetimeFigureOut">
               <a:rPr kumimoji="1" lang="ja-JP" altLang="en-US" smtClean="0"/>
-              <a:t>2024/9/4</a:t>
+              <a:t>2025/3/3</a:t>
             </a:fld>
             <a:endParaRPr kumimoji="1" lang="ja-JP" altLang="en-US"/>
           </a:p>

--- a/ゲーム科1年/00_前期/ゲームプログラミングⅠ/03_ゲームロジックの基本.pptx
+++ b/ゲーム科1年/00_前期/ゲームプログラミングⅠ/03_ゲームロジックの基本.pptx
@@ -268,7 +268,7 @@
           <a:p>
             <a:fld id="{E9CC885B-4903-4D54-9A93-00025F12DED9}" type="datetimeFigureOut">
               <a:rPr kumimoji="1" lang="ja-JP" altLang="en-US" smtClean="0"/>
-              <a:t>2025/3/3</a:t>
+              <a:t>2026/6/4</a:t>
             </a:fld>
             <a:endParaRPr kumimoji="1" lang="ja-JP" altLang="en-US"/>
           </a:p>
@@ -498,7 +498,7 @@
           <a:p>
             <a:fld id="{E9CC885B-4903-4D54-9A93-00025F12DED9}" type="datetimeFigureOut">
               <a:rPr kumimoji="1" lang="ja-JP" altLang="en-US" smtClean="0"/>
-              <a:t>2025/3/3</a:t>
+              <a:t>2026/6/4</a:t>
             </a:fld>
             <a:endParaRPr kumimoji="1" lang="ja-JP" altLang="en-US"/>
           </a:p>
@@ -738,7 +738,7 @@
           <a:p>
             <a:fld id="{E9CC885B-4903-4D54-9A93-00025F12DED9}" type="datetimeFigureOut">
               <a:rPr kumimoji="1" lang="ja-JP" altLang="en-US" smtClean="0"/>
-              <a:t>2025/3/3</a:t>
+              <a:t>2026/6/4</a:t>
             </a:fld>
             <a:endParaRPr kumimoji="1" lang="ja-JP" altLang="en-US"/>
           </a:p>
@@ -968,7 +968,7 @@
           <a:p>
             <a:fld id="{E9CC885B-4903-4D54-9A93-00025F12DED9}" type="datetimeFigureOut">
               <a:rPr kumimoji="1" lang="ja-JP" altLang="en-US" smtClean="0"/>
-              <a:t>2025/3/3</a:t>
+              <a:t>2026/6/4</a:t>
             </a:fld>
             <a:endParaRPr kumimoji="1" lang="ja-JP" altLang="en-US"/>
           </a:p>
@@ -1243,7 +1243,7 @@
           <a:p>
             <a:fld id="{E9CC885B-4903-4D54-9A93-00025F12DED9}" type="datetimeFigureOut">
               <a:rPr kumimoji="1" lang="ja-JP" altLang="en-US" smtClean="0"/>
-              <a:t>2025/3/3</a:t>
+              <a:t>2026/6/4</a:t>
             </a:fld>
             <a:endParaRPr kumimoji="1" lang="ja-JP" altLang="en-US"/>
           </a:p>
@@ -1572,7 +1572,7 @@
           <a:p>
             <a:fld id="{E9CC885B-4903-4D54-9A93-00025F12DED9}" type="datetimeFigureOut">
               <a:rPr kumimoji="1" lang="ja-JP" altLang="en-US" smtClean="0"/>
-              <a:t>2025/3/3</a:t>
+              <a:t>2026/6/4</a:t>
             </a:fld>
             <a:endParaRPr kumimoji="1" lang="ja-JP" altLang="en-US"/>
           </a:p>
@@ -2048,7 +2048,7 @@
           <a:p>
             <a:fld id="{E9CC885B-4903-4D54-9A93-00025F12DED9}" type="datetimeFigureOut">
               <a:rPr kumimoji="1" lang="ja-JP" altLang="en-US" smtClean="0"/>
-              <a:t>2025/3/3</a:t>
+              <a:t>2026/6/4</a:t>
             </a:fld>
             <a:endParaRPr kumimoji="1" lang="ja-JP" altLang="en-US"/>
           </a:p>
@@ -2189,7 +2189,7 @@
           <a:p>
             <a:fld id="{E9CC885B-4903-4D54-9A93-00025F12DED9}" type="datetimeFigureOut">
               <a:rPr kumimoji="1" lang="ja-JP" altLang="en-US" smtClean="0"/>
-              <a:t>2025/3/3</a:t>
+              <a:t>2026/6/4</a:t>
             </a:fld>
             <a:endParaRPr kumimoji="1" lang="ja-JP" altLang="en-US"/>
           </a:p>
@@ -2302,7 +2302,7 @@
           <a:p>
             <a:fld id="{E9CC885B-4903-4D54-9A93-00025F12DED9}" type="datetimeFigureOut">
               <a:rPr kumimoji="1" lang="ja-JP" altLang="en-US" smtClean="0"/>
-              <a:t>2025/3/3</a:t>
+              <a:t>2026/6/4</a:t>
             </a:fld>
             <a:endParaRPr kumimoji="1" lang="ja-JP" altLang="en-US"/>
           </a:p>
@@ -2645,7 +2645,7 @@
           <a:p>
             <a:fld id="{E9CC885B-4903-4D54-9A93-00025F12DED9}" type="datetimeFigureOut">
               <a:rPr kumimoji="1" lang="ja-JP" altLang="en-US" smtClean="0"/>
-              <a:t>2025/3/3</a:t>
+              <a:t>2026/6/4</a:t>
             </a:fld>
             <a:endParaRPr kumimoji="1" lang="ja-JP" altLang="en-US"/>
           </a:p>
@@ -2933,7 +2933,7 @@
           <a:p>
             <a:fld id="{E9CC885B-4903-4D54-9A93-00025F12DED9}" type="datetimeFigureOut">
               <a:rPr kumimoji="1" lang="ja-JP" altLang="en-US" smtClean="0"/>
-              <a:t>2025/3/3</a:t>
+              <a:t>2026/6/4</a:t>
             </a:fld>
             <a:endParaRPr kumimoji="1" lang="ja-JP" altLang="en-US"/>
           </a:p>
@@ -3206,7 +3206,7 @@
           <a:p>
             <a:fld id="{E9CC885B-4903-4D54-9A93-00025F12DED9}" type="datetimeFigureOut">
               <a:rPr kumimoji="1" lang="ja-JP" altLang="en-US" smtClean="0"/>
-              <a:t>2025/3/3</a:t>
+              <a:t>2026/6/4</a:t>
             </a:fld>
             <a:endParaRPr kumimoji="1" lang="ja-JP" altLang="en-US"/>
           </a:p>
@@ -4331,9 +4331,21 @@
           <a:p>
             <a:r>
               <a:rPr lang="ja-JP" altLang="en-US" sz="2400" dirty="0"/>
-              <a:t>まずは初期化　→　更新　→　描画　→　終了</a:t>
-            </a:r>
-            <a:endParaRPr lang="en-US" altLang="ja-JP" sz="2400" dirty="0"/>
+              <a:t>まずは</a:t>
+            </a:r>
+            <a:r>
+              <a:rPr lang="ja-JP" altLang="en-US" sz="2400" b="1" dirty="0">
+                <a:solidFill>
+                  <a:srgbClr val="FF0000"/>
+                </a:solidFill>
+              </a:rPr>
+              <a:t>初期化　→　更新　→　描画　→　終了</a:t>
+            </a:r>
+            <a:endParaRPr lang="en-US" altLang="ja-JP" sz="2400" b="1" dirty="0">
+              <a:solidFill>
+                <a:srgbClr val="FF0000"/>
+              </a:solidFill>
+            </a:endParaRPr>
           </a:p>
           <a:p>
             <a:r>

--- a/ゲーム科1年/00_前期/ゲームプログラミングⅠ/03_ゲームロジックの基本.pptx
+++ b/ゲーム科1年/00_前期/ゲームプログラミングⅠ/03_ゲームロジックの基本.pptx
@@ -268,7 +268,7 @@
           <a:p>
             <a:fld id="{E9CC885B-4903-4D54-9A93-00025F12DED9}" type="datetimeFigureOut">
               <a:rPr kumimoji="1" lang="ja-JP" altLang="en-US" smtClean="0"/>
-              <a:t>2026/6/4</a:t>
+              <a:t>2026/6/22</a:t>
             </a:fld>
             <a:endParaRPr kumimoji="1" lang="ja-JP" altLang="en-US"/>
           </a:p>
@@ -498,7 +498,7 @@
           <a:p>
             <a:fld id="{E9CC885B-4903-4D54-9A93-00025F12DED9}" type="datetimeFigureOut">
               <a:rPr kumimoji="1" lang="ja-JP" altLang="en-US" smtClean="0"/>
-              <a:t>2026/6/4</a:t>
+              <a:t>2026/6/22</a:t>
             </a:fld>
             <a:endParaRPr kumimoji="1" lang="ja-JP" altLang="en-US"/>
           </a:p>
@@ -738,7 +738,7 @@
           <a:p>
             <a:fld id="{E9CC885B-4903-4D54-9A93-00025F12DED9}" type="datetimeFigureOut">
               <a:rPr kumimoji="1" lang="ja-JP" altLang="en-US" smtClean="0"/>
-              <a:t>2026/6/4</a:t>
+              <a:t>2026/6/22</a:t>
             </a:fld>
             <a:endParaRPr kumimoji="1" lang="ja-JP" altLang="en-US"/>
           </a:p>
@@ -968,7 +968,7 @@
           <a:p>
             <a:fld id="{E9CC885B-4903-4D54-9A93-00025F12DED9}" type="datetimeFigureOut">
               <a:rPr kumimoji="1" lang="ja-JP" altLang="en-US" smtClean="0"/>
-              <a:t>2026/6/4</a:t>
+              <a:t>2026/6/22</a:t>
             </a:fld>
             <a:endParaRPr kumimoji="1" lang="ja-JP" altLang="en-US"/>
           </a:p>
@@ -1243,7 +1243,7 @@
           <a:p>
             <a:fld id="{E9CC885B-4903-4D54-9A93-00025F12DED9}" type="datetimeFigureOut">
               <a:rPr kumimoji="1" lang="ja-JP" altLang="en-US" smtClean="0"/>
-              <a:t>2026/6/4</a:t>
+              <a:t>2026/6/22</a:t>
             </a:fld>
             <a:endParaRPr kumimoji="1" lang="ja-JP" altLang="en-US"/>
           </a:p>
@@ -1572,7 +1572,7 @@
           <a:p>
             <a:fld id="{E9CC885B-4903-4D54-9A93-00025F12DED9}" type="datetimeFigureOut">
               <a:rPr kumimoji="1" lang="ja-JP" altLang="en-US" smtClean="0"/>
-              <a:t>2026/6/4</a:t>
+              <a:t>2026/6/22</a:t>
             </a:fld>
             <a:endParaRPr kumimoji="1" lang="ja-JP" altLang="en-US"/>
           </a:p>
@@ -2048,7 +2048,7 @@
           <a:p>
             <a:fld id="{E9CC885B-4903-4D54-9A93-00025F12DED9}" type="datetimeFigureOut">
               <a:rPr kumimoji="1" lang="ja-JP" altLang="en-US" smtClean="0"/>
-              <a:t>2026/6/4</a:t>
+              <a:t>2026/6/22</a:t>
             </a:fld>
             <a:endParaRPr kumimoji="1" lang="ja-JP" altLang="en-US"/>
           </a:p>
@@ -2189,7 +2189,7 @@
           <a:p>
             <a:fld id="{E9CC885B-4903-4D54-9A93-00025F12DED9}" type="datetimeFigureOut">
               <a:rPr kumimoji="1" lang="ja-JP" altLang="en-US" smtClean="0"/>
-              <a:t>2026/6/4</a:t>
+              <a:t>2026/6/22</a:t>
             </a:fld>
             <a:endParaRPr kumimoji="1" lang="ja-JP" altLang="en-US"/>
           </a:p>
@@ -2302,7 +2302,7 @@
           <a:p>
             <a:fld id="{E9CC885B-4903-4D54-9A93-00025F12DED9}" type="datetimeFigureOut">
               <a:rPr kumimoji="1" lang="ja-JP" altLang="en-US" smtClean="0"/>
-              <a:t>2026/6/4</a:t>
+              <a:t>2026/6/22</a:t>
             </a:fld>
             <a:endParaRPr kumimoji="1" lang="ja-JP" altLang="en-US"/>
           </a:p>
@@ -2645,7 +2645,7 @@
           <a:p>
             <a:fld id="{E9CC885B-4903-4D54-9A93-00025F12DED9}" type="datetimeFigureOut">
               <a:rPr kumimoji="1" lang="ja-JP" altLang="en-US" smtClean="0"/>
-              <a:t>2026/6/4</a:t>
+              <a:t>2026/6/22</a:t>
             </a:fld>
             <a:endParaRPr kumimoji="1" lang="ja-JP" altLang="en-US"/>
           </a:p>
@@ -2933,7 +2933,7 @@
           <a:p>
             <a:fld id="{E9CC885B-4903-4D54-9A93-00025F12DED9}" type="datetimeFigureOut">
               <a:rPr kumimoji="1" lang="ja-JP" altLang="en-US" smtClean="0"/>
-              <a:t>2026/6/4</a:t>
+              <a:t>2026/6/22</a:t>
             </a:fld>
             <a:endParaRPr kumimoji="1" lang="ja-JP" altLang="en-US"/>
           </a:p>
@@ -3206,7 +3206,7 @@
           <a:p>
             <a:fld id="{E9CC885B-4903-4D54-9A93-00025F12DED9}" type="datetimeFigureOut">
               <a:rPr kumimoji="1" lang="ja-JP" altLang="en-US" smtClean="0"/>
-              <a:t>2026/6/4</a:t>
+              <a:t>2026/6/22</a:t>
             </a:fld>
             <a:endParaRPr kumimoji="1" lang="ja-JP" altLang="en-US"/>
           </a:p>
@@ -4499,10 +4499,18 @@
           </a:p>
           <a:p>
             <a:r>
-              <a:rPr lang="ja-JP" altLang="en-US" sz="2400" dirty="0"/>
-              <a:t>■主な処理</a:t>
-            </a:r>
-            <a:endParaRPr lang="en-US" altLang="ja-JP" sz="2400" dirty="0"/>
+              <a:rPr lang="ja-JP" altLang="en-US" sz="2400" b="1" dirty="0">
+                <a:solidFill>
+                  <a:srgbClr val="FF0000"/>
+                </a:solidFill>
+              </a:rPr>
+              <a:t>■主な初期化処理</a:t>
+            </a:r>
+            <a:endParaRPr lang="en-US" altLang="ja-JP" sz="2400" b="1" dirty="0">
+              <a:solidFill>
+                <a:srgbClr val="FF0000"/>
+              </a:solidFill>
+            </a:endParaRPr>
           </a:p>
           <a:p>
             <a:r>
@@ -4898,10 +4906,18 @@
           </a:p>
           <a:p>
             <a:r>
-              <a:rPr lang="ja-JP" altLang="en-US" sz="2400" dirty="0"/>
-              <a:t>■主な処理</a:t>
-            </a:r>
-            <a:endParaRPr lang="en-US" altLang="ja-JP" sz="2400" dirty="0"/>
+              <a:rPr lang="ja-JP" altLang="en-US" sz="2400" b="1" dirty="0">
+                <a:solidFill>
+                  <a:srgbClr val="FF0000"/>
+                </a:solidFill>
+              </a:rPr>
+              <a:t>■主な更新処理</a:t>
+            </a:r>
+            <a:endParaRPr lang="en-US" altLang="ja-JP" sz="2400" b="1" dirty="0">
+              <a:solidFill>
+                <a:srgbClr val="FF0000"/>
+              </a:solidFill>
+            </a:endParaRPr>
           </a:p>
           <a:p>
             <a:r>
@@ -5720,10 +5736,18 @@
           </a:p>
           <a:p>
             <a:r>
-              <a:rPr lang="ja-JP" altLang="en-US" sz="2400" dirty="0"/>
-              <a:t>■主な処理</a:t>
-            </a:r>
-            <a:endParaRPr lang="en-US" altLang="ja-JP" sz="2400" dirty="0"/>
+              <a:rPr lang="ja-JP" altLang="en-US" sz="2400" b="1" dirty="0">
+                <a:solidFill>
+                  <a:srgbClr val="FF0000"/>
+                </a:solidFill>
+              </a:rPr>
+              <a:t>■主な終了処理</a:t>
+            </a:r>
+            <a:endParaRPr lang="en-US" altLang="ja-JP" sz="2400" b="1" dirty="0">
+              <a:solidFill>
+                <a:srgbClr val="FF0000"/>
+              </a:solidFill>
+            </a:endParaRPr>
           </a:p>
           <a:p>
             <a:r>
